--- a/Internship PPT.pptx
+++ b/Internship PPT.pptx
@@ -5,7 +5,7 @@
     <p:sldMasterId id="2147483648" r:id="rId1"/>
   </p:sldMasterIdLst>
   <p:notesMasterIdLst>
-    <p:notesMasterId r:id="rId18"/>
+    <p:notesMasterId r:id="rId19"/>
   </p:notesMasterIdLst>
   <p:sldIdLst>
     <p:sldId id="256" r:id="rId2"/>
@@ -21,9 +21,10 @@
     <p:sldId id="270" r:id="rId12"/>
     <p:sldId id="265" r:id="rId13"/>
     <p:sldId id="271" r:id="rId14"/>
-    <p:sldId id="266" r:id="rId15"/>
-    <p:sldId id="267" r:id="rId16"/>
-    <p:sldId id="261" r:id="rId17"/>
+    <p:sldId id="272" r:id="rId15"/>
+    <p:sldId id="266" r:id="rId16"/>
+    <p:sldId id="267" r:id="rId17"/>
+    <p:sldId id="261" r:id="rId18"/>
   </p:sldIdLst>
   <p:sldSz cx="12192000" cy="6858000"/>
   <p:notesSz cx="6858000" cy="9144000"/>
@@ -261,7 +262,7 @@
       <p15:sldGuideLst xmlns:p15="http://schemas.microsoft.com/office/powerpoint/2012/main"/>
     </p:ext>
     <p:ext uri="GoogleSlidesCustomDataVersion2">
-      <go:slidesCustomData xmlns="" xmlns:mc="http://schemas.openxmlformats.org/markup-compatibility/2006" xmlns:mv="urn:schemas-microsoft-com:mac:vml" xmlns:c="http://schemas.openxmlformats.org/drawingml/2006/chart" xmlns:dgm="http://schemas.openxmlformats.org/drawingml/2006/diagram" xmlns:o="urn:schemas-microsoft-com:office:office" xmlns:v="urn:schemas-microsoft-com:vml" xmlns:pvml="urn:schemas-microsoft-com:office:powerpoint" xmlns:com="http://schemas.openxmlformats.org/drawingml/2006/compatibility" xmlns:p14="http://schemas.microsoft.com/office/powerpoint/2010/main" xmlns:p15="http://schemas.microsoft.com/office/powerpoint/2012/main" xmlns:ahyp="http://schemas.microsoft.com/office/drawing/2018/hyperlinkcolor" xmlns:go="http://customooxmlschemas.google.com/" r:id="rId19" roundtripDataSignature="AMtx7mgEImUSBnzB7Nwo1Y+ZxTH9IFmlvQ=="/>
+      <go:slidesCustomData xmlns:go="http://customooxmlschemas.google.com/" xmlns:ahyp="http://schemas.microsoft.com/office/drawing/2018/hyperlinkcolor" xmlns:p15="http://schemas.microsoft.com/office/powerpoint/2012/main" xmlns:p14="http://schemas.microsoft.com/office/powerpoint/2010/main" xmlns:com="http://schemas.openxmlformats.org/drawingml/2006/compatibility" xmlns:pvml="urn:schemas-microsoft-com:office:powerpoint" xmlns:v="urn:schemas-microsoft-com:vml" xmlns:o="urn:schemas-microsoft-com:office:office" xmlns:dgm="http://schemas.openxmlformats.org/drawingml/2006/diagram" xmlns:c="http://schemas.openxmlformats.org/drawingml/2006/chart" xmlns:mv="urn:schemas-microsoft-com:mac:vml" xmlns:mc="http://schemas.openxmlformats.org/markup-compatibility/2006" xmlns="" r:id="rId20" roundtripDataSignature="AMtx7mgEImUSBnzB7Nwo1Y+ZxTH9IFmlvQ=="/>
     </p:ext>
   </p:extLst>
 </p:presentation>
@@ -1574,6 +1575,224 @@
 </p:notes>
 </file>
 
+<file path=ppt/notesSlides/notesSlide10.xml><?xml version="1.0" encoding="utf-8"?>
+<p:notes xmlns:a="http://schemas.openxmlformats.org/drawingml/2006/main" xmlns:r="http://schemas.openxmlformats.org/officeDocument/2006/relationships" xmlns:p="http://schemas.openxmlformats.org/presentationml/2006/main">
+  <p:cSld>
+    <p:spTree>
+      <p:nvGrpSpPr>
+        <p:cNvPr id="1" name=""/>
+        <p:cNvGrpSpPr/>
+        <p:nvPr/>
+      </p:nvGrpSpPr>
+      <p:grpSpPr>
+        <a:xfrm>
+          <a:off x="0" y="0"/>
+          <a:ext cx="0" cy="0"/>
+          <a:chOff x="0" y="0"/>
+          <a:chExt cx="0" cy="0"/>
+        </a:xfrm>
+      </p:grpSpPr>
+      <p:sp>
+        <p:nvSpPr>
+          <p:cNvPr id="2" name="Slide Image Placeholder 1"/>
+          <p:cNvSpPr>
+            <a:spLocks noGrp="1" noRot="1" noChangeAspect="1"/>
+          </p:cNvSpPr>
+          <p:nvPr>
+            <p:ph type="sldImg"/>
+          </p:nvPr>
+        </p:nvSpPr>
+        <p:spPr/>
+      </p:sp>
+      <p:sp>
+        <p:nvSpPr>
+          <p:cNvPr id="3" name="Notes Placeholder 2"/>
+          <p:cNvSpPr>
+            <a:spLocks noGrp="1"/>
+          </p:cNvSpPr>
+          <p:nvPr>
+            <p:ph type="body" idx="1"/>
+          </p:nvPr>
+        </p:nvSpPr>
+        <p:spPr/>
+        <p:txBody>
+          <a:bodyPr/>
+          <a:lstStyle/>
+          <a:p>
+            <a:endParaRPr lang="en-US" dirty="0"/>
+          </a:p>
+        </p:txBody>
+      </p:sp>
+      <p:sp>
+        <p:nvSpPr>
+          <p:cNvPr id="4" name="Slide Number Placeholder 3"/>
+          <p:cNvSpPr>
+            <a:spLocks noGrp="1"/>
+          </p:cNvSpPr>
+          <p:nvPr>
+            <p:ph type="sldNum" idx="10"/>
+          </p:nvPr>
+        </p:nvSpPr>
+        <p:spPr/>
+        <p:txBody>
+          <a:bodyPr/>
+          <a:lstStyle/>
+          <a:p>
+            <a:pPr marL="0" marR="0" lvl="0" indent="0" algn="r" rtl="0">
+              <a:spcBef>
+                <a:spcPts val="0"/>
+              </a:spcBef>
+              <a:spcAft>
+                <a:spcPts val="0"/>
+              </a:spcAft>
+              <a:buNone/>
+            </a:pPr>
+            <a:fld id="{00000000-1234-1234-1234-123412341234}" type="slidenum">
+              <a:rPr lang="en-US" sz="1200" b="0" i="0" u="none" strike="noStrike" cap="none" smtClean="0">
+                <a:solidFill>
+                  <a:schemeClr val="dk1"/>
+                </a:solidFill>
+                <a:latin typeface="Calibri"/>
+                <a:ea typeface="Calibri"/>
+                <a:cs typeface="Calibri"/>
+                <a:sym typeface="Calibri"/>
+              </a:rPr>
+              <a:t>15</a:t>
+            </a:fld>
+            <a:endParaRPr lang="en-US" sz="1200" b="0" i="0" u="none" strike="noStrike" cap="none">
+              <a:solidFill>
+                <a:schemeClr val="dk1"/>
+              </a:solidFill>
+              <a:latin typeface="Calibri"/>
+              <a:ea typeface="Calibri"/>
+              <a:cs typeface="Calibri"/>
+              <a:sym typeface="Calibri"/>
+            </a:endParaRPr>
+          </a:p>
+        </p:txBody>
+      </p:sp>
+    </p:spTree>
+    <p:extLst>
+      <p:ext uri="{BB962C8B-B14F-4D97-AF65-F5344CB8AC3E}">
+        <p14:creationId xmlns:p14="http://schemas.microsoft.com/office/powerpoint/2010/main" val="2523676692"/>
+      </p:ext>
+    </p:extLst>
+  </p:cSld>
+  <p:clrMapOvr>
+    <a:masterClrMapping/>
+  </p:clrMapOvr>
+</p:notes>
+</file>
+
+<file path=ppt/notesSlides/notesSlide11.xml><?xml version="1.0" encoding="utf-8"?>
+<p:notes xmlns:a="http://schemas.openxmlformats.org/drawingml/2006/main" xmlns:r="http://schemas.openxmlformats.org/officeDocument/2006/relationships" xmlns:p="http://schemas.openxmlformats.org/presentationml/2006/main" showMasterSp="0" showMasterPhAnim="0">
+  <p:cSld>
+    <p:spTree>
+      <p:nvGrpSpPr>
+        <p:cNvPr id="1" name="Shape 145"/>
+        <p:cNvGrpSpPr/>
+        <p:nvPr/>
+      </p:nvGrpSpPr>
+      <p:grpSpPr>
+        <a:xfrm>
+          <a:off x="0" y="0"/>
+          <a:ext cx="0" cy="0"/>
+          <a:chOff x="0" y="0"/>
+          <a:chExt cx="0" cy="0"/>
+        </a:xfrm>
+      </p:grpSpPr>
+      <p:sp>
+        <p:nvSpPr>
+          <p:cNvPr id="146" name="Google Shape;146;p6:notes"/>
+          <p:cNvSpPr txBox="1">
+            <a:spLocks noGrp="1"/>
+          </p:cNvSpPr>
+          <p:nvPr>
+            <p:ph type="body" idx="1"/>
+          </p:nvPr>
+        </p:nvSpPr>
+        <p:spPr>
+          <a:xfrm>
+            <a:off x="685800" y="4400550"/>
+            <a:ext cx="5486400" cy="3600450"/>
+          </a:xfrm>
+          <a:prstGeom prst="rect">
+            <a:avLst/>
+          </a:prstGeom>
+        </p:spPr>
+        <p:txBody>
+          <a:bodyPr spcFirstLastPara="1" wrap="square" lIns="91425" tIns="45700" rIns="91425" bIns="45700" anchor="t" anchorCtr="0">
+            <a:noAutofit/>
+          </a:bodyPr>
+          <a:lstStyle/>
+          <a:p>
+            <a:pPr marL="0" lvl="0" indent="0" algn="l" rtl="0">
+              <a:spcBef>
+                <a:spcPts val="0"/>
+              </a:spcBef>
+              <a:spcAft>
+                <a:spcPts val="0"/>
+              </a:spcAft>
+              <a:buNone/>
+            </a:pPr>
+            <a:endParaRPr/>
+          </a:p>
+        </p:txBody>
+      </p:sp>
+      <p:sp>
+        <p:nvSpPr>
+          <p:cNvPr id="147" name="Google Shape;147;p6:notes"/>
+          <p:cNvSpPr>
+            <a:spLocks noGrp="1" noRot="1" noChangeAspect="1"/>
+          </p:cNvSpPr>
+          <p:nvPr>
+            <p:ph type="sldImg" idx="2"/>
+          </p:nvPr>
+        </p:nvSpPr>
+        <p:spPr>
+          <a:xfrm>
+            <a:off x="685800" y="1143000"/>
+            <a:ext cx="5486400" cy="3086100"/>
+          </a:xfrm>
+          <a:custGeom>
+            <a:avLst/>
+            <a:gdLst/>
+            <a:ahLst/>
+            <a:cxnLst/>
+            <a:rect l="l" t="t" r="r" b="b"/>
+            <a:pathLst>
+              <a:path w="120000" h="120000" extrusionOk="0">
+                <a:moveTo>
+                  <a:pt x="0" y="0"/>
+                </a:moveTo>
+                <a:lnTo>
+                  <a:pt x="120000" y="0"/>
+                </a:lnTo>
+                <a:lnTo>
+                  <a:pt x="120000" y="120000"/>
+                </a:lnTo>
+                <a:lnTo>
+                  <a:pt x="0" y="120000"/>
+                </a:lnTo>
+                <a:close/>
+              </a:path>
+            </a:pathLst>
+          </a:custGeom>
+        </p:spPr>
+      </p:sp>
+    </p:spTree>
+    <p:extLst>
+      <p:ext uri="{BB962C8B-B14F-4D97-AF65-F5344CB8AC3E}">
+        <p14:creationId xmlns:p14="http://schemas.microsoft.com/office/powerpoint/2010/main" val="3822880797"/>
+      </p:ext>
+    </p:extLst>
+  </p:cSld>
+  <p:clrMapOvr>
+    <a:masterClrMapping/>
+  </p:clrMapOvr>
+</p:notes>
+</file>
+
 <file path=ppt/notesSlides/notesSlide2.xml><?xml version="1.0" encoding="utf-8"?>
 <p:notes xmlns:a="http://schemas.openxmlformats.org/drawingml/2006/main" xmlns:r="http://schemas.openxmlformats.org/officeDocument/2006/relationships" xmlns:p="http://schemas.openxmlformats.org/presentationml/2006/main" showMasterSp="0" showMasterPhAnim="0">
   <p:cSld>
@@ -2054,7 +2273,7 @@
           <a:bodyPr/>
           <a:lstStyle/>
           <a:p>
-            <a:endParaRPr lang="en-US" dirty="0"/>
+            <a:endParaRPr lang="en-IN" dirty="0"/>
           </a:p>
         </p:txBody>
       </p:sp>
@@ -2065,7 +2284,7 @@
             <a:spLocks noGrp="1"/>
           </p:cNvSpPr>
           <p:nvPr>
-            <p:ph type="sldNum" idx="10"/>
+            <p:ph type="sldNum" idx="12"/>
           </p:nvPr>
         </p:nvSpPr>
         <p:spPr/>
@@ -2092,7 +2311,7 @@
                 <a:cs typeface="Calibri"/>
                 <a:sym typeface="Calibri"/>
               </a:rPr>
-              <a:t>12</a:t>
+              <a:t>7</a:t>
             </a:fld>
             <a:endParaRPr lang="en-US" sz="1200" b="0" i="0" u="none" strike="noStrike" cap="none">
               <a:solidFill>
@@ -2109,7 +2328,7 @@
     </p:spTree>
     <p:extLst>
       <p:ext uri="{BB962C8B-B14F-4D97-AF65-F5344CB8AC3E}">
-        <p14:creationId xmlns:p14="http://schemas.microsoft.com/office/powerpoint/2010/main" val="1168002032"/>
+        <p14:creationId xmlns:p14="http://schemas.microsoft.com/office/powerpoint/2010/main" val="575269598"/>
       </p:ext>
     </p:extLst>
   </p:cSld>
@@ -2163,6 +2382,115 @@
           <a:bodyPr/>
           <a:lstStyle/>
           <a:p>
+            <a:endParaRPr lang="en-IN" dirty="0"/>
+          </a:p>
+        </p:txBody>
+      </p:sp>
+      <p:sp>
+        <p:nvSpPr>
+          <p:cNvPr id="4" name="Slide Number Placeholder 3"/>
+          <p:cNvSpPr>
+            <a:spLocks noGrp="1"/>
+          </p:cNvSpPr>
+          <p:nvPr>
+            <p:ph type="sldNum" idx="12"/>
+          </p:nvPr>
+        </p:nvSpPr>
+        <p:spPr/>
+        <p:txBody>
+          <a:bodyPr/>
+          <a:lstStyle/>
+          <a:p>
+            <a:pPr marL="0" marR="0" lvl="0" indent="0" algn="r" rtl="0">
+              <a:spcBef>
+                <a:spcPts val="0"/>
+              </a:spcBef>
+              <a:spcAft>
+                <a:spcPts val="0"/>
+              </a:spcAft>
+              <a:buNone/>
+            </a:pPr>
+            <a:fld id="{00000000-1234-1234-1234-123412341234}" type="slidenum">
+              <a:rPr lang="en-US" sz="1200" b="0" i="0" u="none" strike="noStrike" cap="none" smtClean="0">
+                <a:solidFill>
+                  <a:schemeClr val="dk1"/>
+                </a:solidFill>
+                <a:latin typeface="Calibri"/>
+                <a:ea typeface="Calibri"/>
+                <a:cs typeface="Calibri"/>
+                <a:sym typeface="Calibri"/>
+              </a:rPr>
+              <a:t>11</a:t>
+            </a:fld>
+            <a:endParaRPr lang="en-US" sz="1200" b="0" i="0" u="none" strike="noStrike" cap="none">
+              <a:solidFill>
+                <a:schemeClr val="dk1"/>
+              </a:solidFill>
+              <a:latin typeface="Calibri"/>
+              <a:ea typeface="Calibri"/>
+              <a:cs typeface="Calibri"/>
+              <a:sym typeface="Calibri"/>
+            </a:endParaRPr>
+          </a:p>
+        </p:txBody>
+      </p:sp>
+    </p:spTree>
+    <p:extLst>
+      <p:ext uri="{BB962C8B-B14F-4D97-AF65-F5344CB8AC3E}">
+        <p14:creationId xmlns:p14="http://schemas.microsoft.com/office/powerpoint/2010/main" val="2065272333"/>
+      </p:ext>
+    </p:extLst>
+  </p:cSld>
+  <p:clrMapOvr>
+    <a:masterClrMapping/>
+  </p:clrMapOvr>
+</p:notes>
+</file>
+
+<file path=ppt/notesSlides/notesSlide8.xml><?xml version="1.0" encoding="utf-8"?>
+<p:notes xmlns:a="http://schemas.openxmlformats.org/drawingml/2006/main" xmlns:r="http://schemas.openxmlformats.org/officeDocument/2006/relationships" xmlns:p="http://schemas.openxmlformats.org/presentationml/2006/main">
+  <p:cSld>
+    <p:spTree>
+      <p:nvGrpSpPr>
+        <p:cNvPr id="1" name=""/>
+        <p:cNvGrpSpPr/>
+        <p:nvPr/>
+      </p:nvGrpSpPr>
+      <p:grpSpPr>
+        <a:xfrm>
+          <a:off x="0" y="0"/>
+          <a:ext cx="0" cy="0"/>
+          <a:chOff x="0" y="0"/>
+          <a:chExt cx="0" cy="0"/>
+        </a:xfrm>
+      </p:grpSpPr>
+      <p:sp>
+        <p:nvSpPr>
+          <p:cNvPr id="2" name="Slide Image Placeholder 1"/>
+          <p:cNvSpPr>
+            <a:spLocks noGrp="1" noRot="1" noChangeAspect="1"/>
+          </p:cNvSpPr>
+          <p:nvPr>
+            <p:ph type="sldImg"/>
+          </p:nvPr>
+        </p:nvSpPr>
+        <p:spPr/>
+      </p:sp>
+      <p:sp>
+        <p:nvSpPr>
+          <p:cNvPr id="3" name="Notes Placeholder 2"/>
+          <p:cNvSpPr>
+            <a:spLocks noGrp="1"/>
+          </p:cNvSpPr>
+          <p:nvPr>
+            <p:ph type="body" idx="1"/>
+          </p:nvPr>
+        </p:nvSpPr>
+        <p:spPr/>
+        <p:txBody>
+          <a:bodyPr/>
+          <a:lstStyle/>
+          <a:p>
             <a:endParaRPr lang="en-US" dirty="0"/>
           </a:p>
         </p:txBody>
@@ -2201,7 +2529,7 @@
                 <a:cs typeface="Calibri"/>
                 <a:sym typeface="Calibri"/>
               </a:rPr>
-              <a:t>14</a:t>
+              <a:t>12</a:t>
             </a:fld>
             <a:endParaRPr lang="en-US" sz="1200" b="0" i="0" u="none" strike="noStrike" cap="none">
               <a:solidFill>
@@ -2218,7 +2546,7 @@
     </p:spTree>
     <p:extLst>
       <p:ext uri="{BB962C8B-B14F-4D97-AF65-F5344CB8AC3E}">
-        <p14:creationId xmlns:p14="http://schemas.microsoft.com/office/powerpoint/2010/main" val="2523676692"/>
+        <p14:creationId xmlns:p14="http://schemas.microsoft.com/office/powerpoint/2010/main" val="1168002032"/>
       </p:ext>
     </p:extLst>
   </p:cSld>
@@ -2228,12 +2556,12 @@
 </p:notes>
 </file>
 
-<file path=ppt/notesSlides/notesSlide8.xml><?xml version="1.0" encoding="utf-8"?>
-<p:notes xmlns:a="http://schemas.openxmlformats.org/drawingml/2006/main" xmlns:r="http://schemas.openxmlformats.org/officeDocument/2006/relationships" xmlns:p="http://schemas.openxmlformats.org/presentationml/2006/main" showMasterSp="0" showMasterPhAnim="0">
+<file path=ppt/notesSlides/notesSlide9.xml><?xml version="1.0" encoding="utf-8"?>
+<p:notes xmlns:a="http://schemas.openxmlformats.org/drawingml/2006/main" xmlns:r="http://schemas.openxmlformats.org/officeDocument/2006/relationships" xmlns:p="http://schemas.openxmlformats.org/presentationml/2006/main">
   <p:cSld>
     <p:spTree>
       <p:nvGrpSpPr>
-        <p:cNvPr id="1" name="Shape 145"/>
+        <p:cNvPr id="1" name=""/>
         <p:cNvGrpSpPr/>
         <p:nvPr/>
       </p:nvGrpSpPr>
@@ -2247,87 +2575,87 @@
       </p:grpSpPr>
       <p:sp>
         <p:nvSpPr>
-          <p:cNvPr id="146" name="Google Shape;146;p6:notes"/>
-          <p:cNvSpPr txBox="1">
+          <p:cNvPr id="2" name="Slide Image Placeholder 1"/>
+          <p:cNvSpPr>
+            <a:spLocks noGrp="1" noRot="1" noChangeAspect="1"/>
+          </p:cNvSpPr>
+          <p:nvPr>
+            <p:ph type="sldImg"/>
+          </p:nvPr>
+        </p:nvSpPr>
+        <p:spPr/>
+      </p:sp>
+      <p:sp>
+        <p:nvSpPr>
+          <p:cNvPr id="3" name="Notes Placeholder 2"/>
+          <p:cNvSpPr>
             <a:spLocks noGrp="1"/>
           </p:cNvSpPr>
           <p:nvPr>
             <p:ph type="body" idx="1"/>
           </p:nvPr>
         </p:nvSpPr>
-        <p:spPr>
-          <a:xfrm>
-            <a:off x="685800" y="4400550"/>
-            <a:ext cx="5486400" cy="3600450"/>
-          </a:xfrm>
-          <a:prstGeom prst="rect">
-            <a:avLst/>
-          </a:prstGeom>
-        </p:spPr>
+        <p:spPr/>
         <p:txBody>
-          <a:bodyPr spcFirstLastPara="1" wrap="square" lIns="91425" tIns="45700" rIns="91425" bIns="45700" anchor="t" anchorCtr="0">
-            <a:noAutofit/>
-          </a:bodyPr>
+          <a:bodyPr/>
           <a:lstStyle/>
           <a:p>
-            <a:pPr marL="0" lvl="0" indent="0" algn="l" rtl="0">
-              <a:spcBef>
-                <a:spcPts val="0"/>
-              </a:spcBef>
-              <a:spcAft>
-                <a:spcPts val="0"/>
-              </a:spcAft>
-              <a:buNone/>
-            </a:pPr>
-            <a:endParaRPr/>
+            <a:endParaRPr lang="en-IN" dirty="0"/>
           </a:p>
         </p:txBody>
       </p:sp>
       <p:sp>
         <p:nvSpPr>
-          <p:cNvPr id="147" name="Google Shape;147;p6:notes"/>
+          <p:cNvPr id="4" name="Slide Number Placeholder 3"/>
           <p:cNvSpPr>
-            <a:spLocks noGrp="1" noRot="1" noChangeAspect="1"/>
+            <a:spLocks noGrp="1"/>
           </p:cNvSpPr>
           <p:nvPr>
-            <p:ph type="sldImg" idx="2"/>
+            <p:ph type="sldNum" idx="12"/>
           </p:nvPr>
         </p:nvSpPr>
-        <p:spPr>
-          <a:xfrm>
-            <a:off x="685800" y="1143000"/>
-            <a:ext cx="5486400" cy="3086100"/>
-          </a:xfrm>
-          <a:custGeom>
-            <a:avLst/>
-            <a:gdLst/>
-            <a:ahLst/>
-            <a:cxnLst/>
-            <a:rect l="l" t="t" r="r" b="b"/>
-            <a:pathLst>
-              <a:path w="120000" h="120000" extrusionOk="0">
-                <a:moveTo>
-                  <a:pt x="0" y="0"/>
-                </a:moveTo>
-                <a:lnTo>
-                  <a:pt x="120000" y="0"/>
-                </a:lnTo>
-                <a:lnTo>
-                  <a:pt x="120000" y="120000"/>
-                </a:lnTo>
-                <a:lnTo>
-                  <a:pt x="0" y="120000"/>
-                </a:lnTo>
-                <a:close/>
-              </a:path>
-            </a:pathLst>
-          </a:custGeom>
-        </p:spPr>
+        <p:spPr/>
+        <p:txBody>
+          <a:bodyPr/>
+          <a:lstStyle/>
+          <a:p>
+            <a:pPr marL="0" marR="0" lvl="0" indent="0" algn="r" rtl="0">
+              <a:spcBef>
+                <a:spcPts val="0"/>
+              </a:spcBef>
+              <a:spcAft>
+                <a:spcPts val="0"/>
+              </a:spcAft>
+              <a:buNone/>
+            </a:pPr>
+            <a:fld id="{00000000-1234-1234-1234-123412341234}" type="slidenum">
+              <a:rPr lang="en-US" sz="1200" b="0" i="0" u="none" strike="noStrike" cap="none" smtClean="0">
+                <a:solidFill>
+                  <a:schemeClr val="dk1"/>
+                </a:solidFill>
+                <a:latin typeface="Calibri"/>
+                <a:ea typeface="Calibri"/>
+                <a:cs typeface="Calibri"/>
+                <a:sym typeface="Calibri"/>
+              </a:rPr>
+              <a:t>14</a:t>
+            </a:fld>
+            <a:endParaRPr lang="en-US" sz="1200" b="0" i="0" u="none" strike="noStrike" cap="none">
+              <a:solidFill>
+                <a:schemeClr val="dk1"/>
+              </a:solidFill>
+              <a:latin typeface="Calibri"/>
+              <a:ea typeface="Calibri"/>
+              <a:cs typeface="Calibri"/>
+              <a:sym typeface="Calibri"/>
+            </a:endParaRPr>
+          </a:p>
+        </p:txBody>
       </p:sp>
     </p:spTree>
     <p:extLst>
       <p:ext uri="{BB962C8B-B14F-4D97-AF65-F5344CB8AC3E}">
-        <p14:creationId xmlns:p14="http://schemas.microsoft.com/office/powerpoint/2010/main" val="3822880797"/>
+        <p14:creationId xmlns:p14="http://schemas.microsoft.com/office/powerpoint/2010/main" val="15680626"/>
       </p:ext>
     </p:extLst>
   </p:cSld>
@@ -13563,7 +13891,7 @@
         </p:nvSpPr>
         <p:spPr>
           <a:xfrm>
-            <a:off x="838200" y="2051050"/>
+            <a:off x="838200" y="1893829"/>
             <a:ext cx="10515600" cy="4895850"/>
           </a:xfrm>
         </p:spPr>
@@ -13724,7 +14052,7 @@
                   </a:schemeClr>
                 </a:solidFill>
               </a:rPr>
-              <a:t>ENG22CT0045, Dept. of Computer Science &amp; Technology, </a:t>
+              <a:t>ENG22CT0052, Dept. of Computer Science &amp; Technology, </a:t>
             </a:r>
             <a:r>
               <a:rPr lang="en-US" sz="1300" dirty="0" err="1">
@@ -13958,21 +14286,118 @@
           <p:nvPr/>
         </p:nvPicPr>
         <p:blipFill>
-          <a:blip r:embed="rId2"/>
+          <a:blip r:embed="rId3"/>
           <a:stretch>
             <a:fillRect/>
           </a:stretch>
         </p:blipFill>
         <p:spPr>
           <a:xfrm>
-            <a:off x="0" y="-85905"/>
-            <a:ext cx="12192000" cy="6442255"/>
+            <a:off x="185195" y="136525"/>
+            <a:ext cx="11864052" cy="5949131"/>
           </a:xfrm>
           <a:prstGeom prst="rect">
             <a:avLst/>
           </a:prstGeom>
         </p:spPr>
       </p:pic>
+      <p:sp>
+        <p:nvSpPr>
+          <p:cNvPr id="5" name="TextBox 4">
+            <a:extLst>
+              <a:ext uri="{FF2B5EF4-FFF2-40B4-BE49-F238E27FC236}">
+                <a16:creationId xmlns:a16="http://schemas.microsoft.com/office/drawing/2014/main" id="{C40B92C5-0C34-DD20-F0C1-6720C37B597A}"/>
+              </a:ext>
+            </a:extLst>
+          </p:cNvPr>
+          <p:cNvSpPr txBox="1"/>
+          <p:nvPr/>
+        </p:nvSpPr>
+        <p:spPr>
+          <a:xfrm>
+            <a:off x="1264535" y="6085656"/>
+            <a:ext cx="9303152" cy="738664"/>
+          </a:xfrm>
+          <a:prstGeom prst="rect">
+            <a:avLst/>
+          </a:prstGeom>
+          <a:noFill/>
+        </p:spPr>
+        <p:txBody>
+          <a:bodyPr wrap="square">
+            <a:spAutoFit/>
+          </a:bodyPr>
+          <a:lstStyle/>
+          <a:p>
+            <a:pPr indent="457200" algn="ctr">
+              <a:buNone/>
+            </a:pPr>
+            <a:r>
+              <a:rPr lang="en-IN" sz="1400" b="1" dirty="0">
+                <a:effectLst/>
+                <a:latin typeface="Times New Roman" panose="02020603050405020304" pitchFamily="18" charset="0"/>
+                <a:ea typeface="Times New Roman" panose="02020603050405020304" pitchFamily="18" charset="0"/>
+              </a:rPr>
+              <a:t>Fig 4:</a:t>
+            </a:r>
+            <a:r>
+              <a:rPr lang="en-IN" sz="1400" dirty="0">
+                <a:effectLst/>
+                <a:latin typeface="Times New Roman" panose="02020603050405020304" pitchFamily="18" charset="0"/>
+                <a:ea typeface="Times New Roman" panose="02020603050405020304" pitchFamily="18" charset="0"/>
+              </a:rPr>
+              <a:t> </a:t>
+            </a:r>
+            <a:r>
+              <a:rPr lang="en-IN" sz="1400" b="1" dirty="0">
+                <a:effectLst/>
+                <a:latin typeface="Times New Roman" panose="02020603050405020304" pitchFamily="18" charset="0"/>
+                <a:ea typeface="Times New Roman" panose="02020603050405020304" pitchFamily="18" charset="0"/>
+              </a:rPr>
+              <a:t>Interactive Sales Dashboard</a:t>
+            </a:r>
+            <a:endParaRPr lang="en-IN" sz="1200" dirty="0">
+              <a:effectLst/>
+              <a:latin typeface="Times New Roman" panose="02020603050405020304" pitchFamily="18" charset="0"/>
+              <a:ea typeface="Times New Roman" panose="02020603050405020304" pitchFamily="18" charset="0"/>
+            </a:endParaRPr>
+          </a:p>
+          <a:p>
+            <a:pPr algn="just">
+              <a:buNone/>
+            </a:pPr>
+            <a:r>
+              <a:rPr lang="en-IN" sz="1400" dirty="0">
+                <a:effectLst/>
+                <a:latin typeface="Times New Roman" panose="02020603050405020304" pitchFamily="18" charset="0"/>
+                <a:ea typeface="Times New Roman" panose="02020603050405020304" pitchFamily="18" charset="0"/>
+              </a:rPr>
+              <a:t>This dashboard displays sales insights using interactive visualizations, including bar, line, and pie charts. It allows users to </a:t>
+            </a:r>
+            <a:r>
+              <a:rPr lang="en-IN" sz="1400" dirty="0" err="1">
+                <a:effectLst/>
+                <a:latin typeface="Times New Roman" panose="02020603050405020304" pitchFamily="18" charset="0"/>
+                <a:ea typeface="Times New Roman" panose="02020603050405020304" pitchFamily="18" charset="0"/>
+              </a:rPr>
+              <a:t>analyze</a:t>
+            </a:r>
+            <a:r>
+              <a:rPr lang="en-IN" sz="1400" dirty="0">
+                <a:effectLst/>
+                <a:latin typeface="Times New Roman" panose="02020603050405020304" pitchFamily="18" charset="0"/>
+                <a:ea typeface="Times New Roman" panose="02020603050405020304" pitchFamily="18" charset="0"/>
+              </a:rPr>
+              <a:t> sales by product line, track sales over time, and view distribution across categories.</a:t>
+            </a:r>
+            <a:endParaRPr lang="en-IN" sz="1200" dirty="0">
+              <a:effectLst/>
+              <a:latin typeface="Times New Roman" panose="02020603050405020304" pitchFamily="18" charset="0"/>
+              <a:ea typeface="Times New Roman" panose="02020603050405020304" pitchFamily="18" charset="0"/>
+            </a:endParaRPr>
+          </a:p>
+        </p:txBody>
+      </p:sp>
     </p:spTree>
     <p:extLst>
       <p:ext uri="{BB962C8B-B14F-4D97-AF65-F5344CB8AC3E}">
@@ -14048,7 +14473,7 @@
         </p:nvSpPr>
         <p:spPr>
           <a:xfrm>
-            <a:off x="838200" y="2121949"/>
+            <a:off x="838200" y="1915574"/>
             <a:ext cx="10515600" cy="4942426"/>
           </a:xfrm>
         </p:spPr>
@@ -14218,7 +14643,7 @@
                   </a:schemeClr>
                 </a:solidFill>
               </a:rPr>
-              <a:t>ENG22CT0045, Dept. of Computer Science &amp; Technology, </a:t>
+              <a:t>ENG22CT0052, Dept. of Computer Science &amp; Technology, </a:t>
             </a:r>
             <a:r>
               <a:rPr lang="en-US" sz="1300" dirty="0" err="1">
@@ -14458,20 +14883,101 @@
         </p:blipFill>
         <p:spPr>
           <a:xfrm>
-            <a:off x="0" y="1520618"/>
-            <a:ext cx="5235394" cy="3490262"/>
+            <a:off x="145722" y="1520618"/>
+            <a:ext cx="5089671" cy="3490262"/>
           </a:xfrm>
           <a:prstGeom prst="rect">
             <a:avLst/>
           </a:prstGeom>
         </p:spPr>
       </p:pic>
+      <p:sp>
+        <p:nvSpPr>
+          <p:cNvPr id="5" name="TextBox 4">
+            <a:extLst>
+              <a:ext uri="{FF2B5EF4-FFF2-40B4-BE49-F238E27FC236}">
+                <a16:creationId xmlns:a16="http://schemas.microsoft.com/office/drawing/2014/main" id="{21E15B43-DCCA-7875-7300-1606C9F8701A}"/>
+              </a:ext>
+            </a:extLst>
+          </p:cNvPr>
+          <p:cNvSpPr txBox="1"/>
+          <p:nvPr/>
+        </p:nvSpPr>
+        <p:spPr>
+          <a:xfrm>
+            <a:off x="0" y="5162597"/>
+            <a:ext cx="5235394" cy="1169551"/>
+          </a:xfrm>
+          <a:prstGeom prst="rect">
+            <a:avLst/>
+          </a:prstGeom>
+          <a:noFill/>
+        </p:spPr>
+        <p:txBody>
+          <a:bodyPr wrap="square">
+            <a:spAutoFit/>
+          </a:bodyPr>
+          <a:lstStyle/>
+          <a:p>
+            <a:pPr indent="457200" algn="ctr">
+              <a:buNone/>
+            </a:pPr>
+            <a:r>
+              <a:rPr lang="en-IN" sz="1400" b="1" dirty="0">
+                <a:effectLst/>
+                <a:latin typeface="Times New Roman" panose="02020603050405020304" pitchFamily="18" charset="0"/>
+                <a:ea typeface="Times New Roman" panose="02020603050405020304" pitchFamily="18" charset="0"/>
+              </a:rPr>
+              <a:t>Fig 5:</a:t>
+            </a:r>
+            <a:r>
+              <a:rPr lang="en-IN" sz="1400" dirty="0">
+                <a:effectLst/>
+                <a:latin typeface="Times New Roman" panose="02020603050405020304" pitchFamily="18" charset="0"/>
+                <a:ea typeface="Times New Roman" panose="02020603050405020304" pitchFamily="18" charset="0"/>
+              </a:rPr>
+              <a:t> </a:t>
+            </a:r>
+            <a:r>
+              <a:rPr lang="en-IN" sz="1400" b="1" dirty="0">
+                <a:effectLst/>
+                <a:latin typeface="Times New Roman" panose="02020603050405020304" pitchFamily="18" charset="0"/>
+                <a:ea typeface="Times New Roman" panose="02020603050405020304" pitchFamily="18" charset="0"/>
+              </a:rPr>
+              <a:t>Logistic Regression Model Training and Accuracy</a:t>
+            </a:r>
+            <a:endParaRPr lang="en-IN" sz="1200" dirty="0">
+              <a:effectLst/>
+              <a:latin typeface="Times New Roman" panose="02020603050405020304" pitchFamily="18" charset="0"/>
+              <a:ea typeface="Times New Roman" panose="02020603050405020304" pitchFamily="18" charset="0"/>
+            </a:endParaRPr>
+          </a:p>
+          <a:p>
+            <a:pPr algn="just">
+              <a:buNone/>
+            </a:pPr>
+            <a:r>
+              <a:rPr lang="en-IN" sz="1400" dirty="0">
+                <a:effectLst/>
+                <a:latin typeface="Times New Roman" panose="02020603050405020304" pitchFamily="18" charset="0"/>
+                <a:ea typeface="Times New Roman" panose="02020603050405020304" pitchFamily="18" charset="0"/>
+              </a:rPr>
+              <a:t>This output shows the training and evaluation of the Logistic Regression model for sentiment analysis. The model is trained on text data and achieves an accuracy of approximately 91%, indicating good performance in classification.</a:t>
+            </a:r>
+            <a:endParaRPr lang="en-IN" sz="1200" dirty="0">
+              <a:effectLst/>
+              <a:latin typeface="Times New Roman" panose="02020603050405020304" pitchFamily="18" charset="0"/>
+              <a:ea typeface="Times New Roman" panose="02020603050405020304" pitchFamily="18" charset="0"/>
+            </a:endParaRPr>
+          </a:p>
+        </p:txBody>
+      </p:sp>
       <p:pic>
         <p:nvPicPr>
-          <p:cNvPr id="6" name="Picture 5">
+          <p:cNvPr id="9" name="Picture 8">
             <a:extLst>
               <a:ext uri="{FF2B5EF4-FFF2-40B4-BE49-F238E27FC236}">
-                <a16:creationId xmlns:a16="http://schemas.microsoft.com/office/drawing/2014/main" id="{6920067D-530D-483D-198F-2EB6309E3EC7}"/>
+                <a16:creationId xmlns:a16="http://schemas.microsoft.com/office/drawing/2014/main" id="{BD06E16C-972B-E1E5-738A-ED54A486C224}"/>
               </a:ext>
             </a:extLst>
           </p:cNvPr>
@@ -14488,14 +14994,95 @@
         </p:blipFill>
         <p:spPr>
           <a:xfrm>
-            <a:off x="5335710" y="156520"/>
-            <a:ext cx="6759526" cy="6218459"/>
+            <a:off x="5384669" y="136525"/>
+            <a:ext cx="6661608" cy="5610848"/>
           </a:xfrm>
           <a:prstGeom prst="rect">
             <a:avLst/>
           </a:prstGeom>
         </p:spPr>
       </p:pic>
+      <p:sp>
+        <p:nvSpPr>
+          <p:cNvPr id="11" name="TextBox 10">
+            <a:extLst>
+              <a:ext uri="{FF2B5EF4-FFF2-40B4-BE49-F238E27FC236}">
+                <a16:creationId xmlns:a16="http://schemas.microsoft.com/office/drawing/2014/main" id="{EC59159D-91DD-DFDA-BB60-07A29DDA0E3D}"/>
+              </a:ext>
+            </a:extLst>
+          </p:cNvPr>
+          <p:cNvSpPr txBox="1"/>
+          <p:nvPr/>
+        </p:nvSpPr>
+        <p:spPr>
+          <a:xfrm>
+            <a:off x="5784448" y="5688449"/>
+            <a:ext cx="6105644" cy="1169551"/>
+          </a:xfrm>
+          <a:prstGeom prst="rect">
+            <a:avLst/>
+          </a:prstGeom>
+          <a:noFill/>
+        </p:spPr>
+        <p:txBody>
+          <a:bodyPr wrap="square">
+            <a:spAutoFit/>
+          </a:bodyPr>
+          <a:lstStyle/>
+          <a:p>
+            <a:pPr indent="457200" algn="ctr">
+              <a:buNone/>
+            </a:pPr>
+            <a:r>
+              <a:rPr lang="en-IN" sz="1400" b="1" dirty="0">
+                <a:effectLst/>
+                <a:latin typeface="Times New Roman" panose="02020603050405020304" pitchFamily="18" charset="0"/>
+                <a:ea typeface="Times New Roman" panose="02020603050405020304" pitchFamily="18" charset="0"/>
+              </a:rPr>
+              <a:t>Fig 6:</a:t>
+            </a:r>
+            <a:r>
+              <a:rPr lang="en-IN" sz="1400" dirty="0">
+                <a:effectLst/>
+                <a:latin typeface="Times New Roman" panose="02020603050405020304" pitchFamily="18" charset="0"/>
+                <a:ea typeface="Times New Roman" panose="02020603050405020304" pitchFamily="18" charset="0"/>
+              </a:rPr>
+              <a:t> </a:t>
+            </a:r>
+            <a:r>
+              <a:rPr lang="en-IN" sz="1400" b="1" dirty="0">
+                <a:effectLst/>
+                <a:latin typeface="Times New Roman" panose="02020603050405020304" pitchFamily="18" charset="0"/>
+                <a:ea typeface="Times New Roman" panose="02020603050405020304" pitchFamily="18" charset="0"/>
+              </a:rPr>
+              <a:t>Sentiment Distribution Visualization</a:t>
+            </a:r>
+            <a:endParaRPr lang="en-IN" sz="1200" dirty="0">
+              <a:effectLst/>
+              <a:latin typeface="Times New Roman" panose="02020603050405020304" pitchFamily="18" charset="0"/>
+              <a:ea typeface="Times New Roman" panose="02020603050405020304" pitchFamily="18" charset="0"/>
+            </a:endParaRPr>
+          </a:p>
+          <a:p>
+            <a:pPr algn="just">
+              <a:buNone/>
+            </a:pPr>
+            <a:r>
+              <a:rPr lang="en-IN" sz="1400" dirty="0">
+                <a:effectLst/>
+                <a:latin typeface="Times New Roman" panose="02020603050405020304" pitchFamily="18" charset="0"/>
+                <a:ea typeface="Times New Roman" panose="02020603050405020304" pitchFamily="18" charset="0"/>
+              </a:rPr>
+              <a:t>This visualization represents the distribution of sentiment labels (positive and negative) in the dataset. The bar chart shows that both sentiment classes are nearly balanced, which helps in reducing bias during model training. A balanced dataset improves the performance and reliability of the sentiment analysis model.</a:t>
+            </a:r>
+            <a:endParaRPr lang="en-IN" sz="1200" dirty="0">
+              <a:effectLst/>
+              <a:latin typeface="Times New Roman" panose="02020603050405020304" pitchFamily="18" charset="0"/>
+              <a:ea typeface="Times New Roman" panose="02020603050405020304" pitchFamily="18" charset="0"/>
+            </a:endParaRPr>
+          </a:p>
+        </p:txBody>
+      </p:sp>
     </p:spTree>
     <p:extLst>
       <p:ext uri="{BB962C8B-B14F-4D97-AF65-F5344CB8AC3E}">
@@ -14510,6 +15097,314 @@
 </file>
 
 <file path=ppt/slides/slide14.xml><?xml version="1.0" encoding="utf-8"?>
+<p:sld xmlns:a="http://schemas.openxmlformats.org/drawingml/2006/main" xmlns:r="http://schemas.openxmlformats.org/officeDocument/2006/relationships" xmlns:p="http://schemas.openxmlformats.org/presentationml/2006/main">
+  <p:cSld>
+    <p:spTree>
+      <p:nvGrpSpPr>
+        <p:cNvPr id="1" name=""/>
+        <p:cNvGrpSpPr/>
+        <p:nvPr/>
+      </p:nvGrpSpPr>
+      <p:grpSpPr>
+        <a:xfrm>
+          <a:off x="0" y="0"/>
+          <a:ext cx="0" cy="0"/>
+          <a:chOff x="0" y="0"/>
+          <a:chExt cx="0" cy="0"/>
+        </a:xfrm>
+      </p:grpSpPr>
+      <p:sp>
+        <p:nvSpPr>
+          <p:cNvPr id="2" name="Slide Number Placeholder 1">
+            <a:extLst>
+              <a:ext uri="{FF2B5EF4-FFF2-40B4-BE49-F238E27FC236}">
+                <a16:creationId xmlns:a16="http://schemas.microsoft.com/office/drawing/2014/main" id="{792ED8FE-04FE-343C-A52C-98C79BAE530F}"/>
+              </a:ext>
+            </a:extLst>
+          </p:cNvPr>
+          <p:cNvSpPr>
+            <a:spLocks noGrp="1"/>
+          </p:cNvSpPr>
+          <p:nvPr>
+            <p:ph type="sldNum" idx="12"/>
+          </p:nvPr>
+        </p:nvSpPr>
+        <p:spPr/>
+        <p:txBody>
+          <a:bodyPr/>
+          <a:lstStyle/>
+          <a:p>
+            <a:pPr marL="0" lvl="0" indent="0" algn="r" rtl="0">
+              <a:spcBef>
+                <a:spcPts val="0"/>
+              </a:spcBef>
+              <a:spcAft>
+                <a:spcPts val="0"/>
+              </a:spcAft>
+              <a:buNone/>
+            </a:pPr>
+            <a:fld id="{00000000-1234-1234-1234-123412341234}" type="slidenum">
+              <a:rPr lang="en-US" smtClean="0"/>
+              <a:t>14</a:t>
+            </a:fld>
+            <a:endParaRPr lang="en-US"/>
+          </a:p>
+        </p:txBody>
+      </p:sp>
+      <p:pic>
+        <p:nvPicPr>
+          <p:cNvPr id="6" name="Picture 5">
+            <a:extLst>
+              <a:ext uri="{FF2B5EF4-FFF2-40B4-BE49-F238E27FC236}">
+                <a16:creationId xmlns:a16="http://schemas.microsoft.com/office/drawing/2014/main" id="{FEDAF2B3-065A-D495-D604-5AE53E9CB56F}"/>
+              </a:ext>
+            </a:extLst>
+          </p:cNvPr>
+          <p:cNvPicPr>
+            <a:picLocks noChangeAspect="1"/>
+          </p:cNvPicPr>
+          <p:nvPr/>
+        </p:nvPicPr>
+        <p:blipFill>
+          <a:blip r:embed="rId3"/>
+          <a:stretch>
+            <a:fillRect/>
+          </a:stretch>
+        </p:blipFill>
+        <p:spPr>
+          <a:xfrm>
+            <a:off x="154638" y="118661"/>
+            <a:ext cx="6060475" cy="5283581"/>
+          </a:xfrm>
+          <a:prstGeom prst="rect">
+            <a:avLst/>
+          </a:prstGeom>
+        </p:spPr>
+      </p:pic>
+      <p:pic>
+        <p:nvPicPr>
+          <p:cNvPr id="7" name="Picture 6">
+            <a:extLst>
+              <a:ext uri="{FF2B5EF4-FFF2-40B4-BE49-F238E27FC236}">
+                <a16:creationId xmlns:a16="http://schemas.microsoft.com/office/drawing/2014/main" id="{79A1D221-F1BA-AC5A-2EAF-8532A30DCC96}"/>
+              </a:ext>
+            </a:extLst>
+          </p:cNvPr>
+          <p:cNvPicPr>
+            <a:picLocks noChangeAspect="1"/>
+          </p:cNvPicPr>
+          <p:nvPr/>
+        </p:nvPicPr>
+        <p:blipFill>
+          <a:blip r:embed="rId4"/>
+          <a:stretch>
+            <a:fillRect/>
+          </a:stretch>
+        </p:blipFill>
+        <p:spPr>
+          <a:xfrm>
+            <a:off x="6365546" y="118661"/>
+            <a:ext cx="5671815" cy="5283581"/>
+          </a:xfrm>
+          <a:prstGeom prst="rect">
+            <a:avLst/>
+          </a:prstGeom>
+        </p:spPr>
+      </p:pic>
+      <p:sp>
+        <p:nvSpPr>
+          <p:cNvPr id="9" name="TextBox 8">
+            <a:extLst>
+              <a:ext uri="{FF2B5EF4-FFF2-40B4-BE49-F238E27FC236}">
+                <a16:creationId xmlns:a16="http://schemas.microsoft.com/office/drawing/2014/main" id="{9AF93E13-399E-3850-812F-63AFC43B6269}"/>
+              </a:ext>
+            </a:extLst>
+          </p:cNvPr>
+          <p:cNvSpPr txBox="1"/>
+          <p:nvPr/>
+        </p:nvSpPr>
+        <p:spPr>
+          <a:xfrm>
+            <a:off x="6470247" y="5572446"/>
+            <a:ext cx="5413093" cy="954107"/>
+          </a:xfrm>
+          <a:prstGeom prst="rect">
+            <a:avLst/>
+          </a:prstGeom>
+          <a:noFill/>
+        </p:spPr>
+        <p:txBody>
+          <a:bodyPr wrap="square">
+            <a:spAutoFit/>
+          </a:bodyPr>
+          <a:lstStyle/>
+          <a:p>
+            <a:pPr indent="457200" algn="ctr">
+              <a:buNone/>
+            </a:pPr>
+            <a:r>
+              <a:rPr lang="en-IN" sz="1400" b="1" dirty="0">
+                <a:effectLst/>
+                <a:latin typeface="Times New Roman" panose="02020603050405020304" pitchFamily="18" charset="0"/>
+                <a:ea typeface="Times New Roman" panose="02020603050405020304" pitchFamily="18" charset="0"/>
+              </a:rPr>
+              <a:t>Fig 8:</a:t>
+            </a:r>
+            <a:r>
+              <a:rPr lang="en-IN" sz="1400" dirty="0">
+                <a:effectLst/>
+                <a:latin typeface="Times New Roman" panose="02020603050405020304" pitchFamily="18" charset="0"/>
+                <a:ea typeface="Times New Roman" panose="02020603050405020304" pitchFamily="18" charset="0"/>
+              </a:rPr>
+              <a:t> </a:t>
+            </a:r>
+            <a:r>
+              <a:rPr lang="en-IN" sz="1400" b="1" dirty="0">
+                <a:effectLst/>
+                <a:latin typeface="Times New Roman" panose="02020603050405020304" pitchFamily="18" charset="0"/>
+                <a:ea typeface="Times New Roman" panose="02020603050405020304" pitchFamily="18" charset="0"/>
+              </a:rPr>
+              <a:t>Sentiment Prediction on Sample Reviews</a:t>
+            </a:r>
+            <a:endParaRPr lang="en-IN" sz="1200" dirty="0">
+              <a:effectLst/>
+              <a:latin typeface="Times New Roman" panose="02020603050405020304" pitchFamily="18" charset="0"/>
+              <a:ea typeface="Times New Roman" panose="02020603050405020304" pitchFamily="18" charset="0"/>
+            </a:endParaRPr>
+          </a:p>
+          <a:p>
+            <a:pPr algn="just">
+              <a:buNone/>
+            </a:pPr>
+            <a:r>
+              <a:rPr lang="en-IN" sz="1400" dirty="0">
+                <a:effectLst/>
+                <a:latin typeface="Times New Roman" panose="02020603050405020304" pitchFamily="18" charset="0"/>
+                <a:ea typeface="Times New Roman" panose="02020603050405020304" pitchFamily="18" charset="0"/>
+              </a:rPr>
+              <a:t>This output demonstrates the model predicting sentiment for new text inputs. The model correctly classifies a positive review and a negative review, showing its effectiveness in real-time sentiment prediction.</a:t>
+            </a:r>
+            <a:endParaRPr lang="en-IN" sz="1200" dirty="0">
+              <a:effectLst/>
+              <a:latin typeface="Times New Roman" panose="02020603050405020304" pitchFamily="18" charset="0"/>
+              <a:ea typeface="Times New Roman" panose="02020603050405020304" pitchFamily="18" charset="0"/>
+            </a:endParaRPr>
+          </a:p>
+        </p:txBody>
+      </p:sp>
+      <p:sp>
+        <p:nvSpPr>
+          <p:cNvPr id="11" name="TextBox 10">
+            <a:extLst>
+              <a:ext uri="{FF2B5EF4-FFF2-40B4-BE49-F238E27FC236}">
+                <a16:creationId xmlns:a16="http://schemas.microsoft.com/office/drawing/2014/main" id="{5916E39D-7B23-AF2B-83EA-87CA48B4DF7A}"/>
+              </a:ext>
+            </a:extLst>
+          </p:cNvPr>
+          <p:cNvSpPr txBox="1"/>
+          <p:nvPr/>
+        </p:nvSpPr>
+        <p:spPr>
+          <a:xfrm>
+            <a:off x="121043" y="5572446"/>
+            <a:ext cx="6094070" cy="1384995"/>
+          </a:xfrm>
+          <a:prstGeom prst="rect">
+            <a:avLst/>
+          </a:prstGeom>
+          <a:noFill/>
+        </p:spPr>
+        <p:txBody>
+          <a:bodyPr wrap="square">
+            <a:spAutoFit/>
+          </a:bodyPr>
+          <a:lstStyle/>
+          <a:p>
+            <a:pPr indent="457200" algn="ctr">
+              <a:buNone/>
+            </a:pPr>
+            <a:r>
+              <a:rPr lang="en-IN" sz="1400" b="1" dirty="0">
+                <a:effectLst/>
+                <a:latin typeface="Times New Roman" panose="02020603050405020304" pitchFamily="18" charset="0"/>
+                <a:ea typeface="Times New Roman" panose="02020603050405020304" pitchFamily="18" charset="0"/>
+              </a:rPr>
+              <a:t>Fig 7:</a:t>
+            </a:r>
+            <a:r>
+              <a:rPr lang="en-IN" sz="1400" dirty="0">
+                <a:effectLst/>
+                <a:latin typeface="Times New Roman" panose="02020603050405020304" pitchFamily="18" charset="0"/>
+                <a:ea typeface="Times New Roman" panose="02020603050405020304" pitchFamily="18" charset="0"/>
+              </a:rPr>
+              <a:t> </a:t>
+            </a:r>
+            <a:r>
+              <a:rPr lang="en-IN" sz="1400" b="1" dirty="0">
+                <a:effectLst/>
+                <a:latin typeface="Times New Roman" panose="02020603050405020304" pitchFamily="18" charset="0"/>
+                <a:ea typeface="Times New Roman" panose="02020603050405020304" pitchFamily="18" charset="0"/>
+              </a:rPr>
+              <a:t>Confusion Matrix</a:t>
+            </a:r>
+            <a:endParaRPr lang="en-IN" sz="1200" dirty="0">
+              <a:effectLst/>
+              <a:latin typeface="Times New Roman" panose="02020603050405020304" pitchFamily="18" charset="0"/>
+              <a:ea typeface="Times New Roman" panose="02020603050405020304" pitchFamily="18" charset="0"/>
+            </a:endParaRPr>
+          </a:p>
+          <a:p>
+            <a:pPr algn="just">
+              <a:buNone/>
+            </a:pPr>
+            <a:r>
+              <a:rPr lang="en-IN" sz="1400" dirty="0">
+                <a:effectLst/>
+                <a:latin typeface="Times New Roman" panose="02020603050405020304" pitchFamily="18" charset="0"/>
+                <a:ea typeface="Times New Roman" panose="02020603050405020304" pitchFamily="18" charset="0"/>
+              </a:rPr>
+              <a:t>This confusion matrix visualizes the performance of the sentiment analysis model by comparing actual and predicted labels. It shows the number of correct predictions as well as misclassifications, helping to evaluate how well the model distinguishes between positive and negative sentiments.</a:t>
+            </a:r>
+            <a:endParaRPr lang="en-IN" sz="1200" dirty="0">
+              <a:effectLst/>
+              <a:latin typeface="Times New Roman" panose="02020603050405020304" pitchFamily="18" charset="0"/>
+              <a:ea typeface="Times New Roman" panose="02020603050405020304" pitchFamily="18" charset="0"/>
+            </a:endParaRPr>
+          </a:p>
+          <a:p>
+            <a:pPr algn="just">
+              <a:buNone/>
+            </a:pPr>
+            <a:r>
+              <a:rPr lang="en-IN" sz="1400" dirty="0">
+                <a:effectLst/>
+                <a:latin typeface="Times New Roman" panose="02020603050405020304" pitchFamily="18" charset="0"/>
+                <a:ea typeface="Times New Roman" panose="02020603050405020304" pitchFamily="18" charset="0"/>
+              </a:rPr>
+              <a:t> </a:t>
+            </a:r>
+            <a:endParaRPr lang="en-IN" sz="1200" dirty="0">
+              <a:effectLst/>
+              <a:latin typeface="Times New Roman" panose="02020603050405020304" pitchFamily="18" charset="0"/>
+              <a:ea typeface="Times New Roman" panose="02020603050405020304" pitchFamily="18" charset="0"/>
+            </a:endParaRPr>
+          </a:p>
+        </p:txBody>
+      </p:sp>
+    </p:spTree>
+    <p:extLst>
+      <p:ext uri="{BB962C8B-B14F-4D97-AF65-F5344CB8AC3E}">
+        <p14:creationId xmlns:p14="http://schemas.microsoft.com/office/powerpoint/2010/main" val="2585579019"/>
+      </p:ext>
+    </p:extLst>
+  </p:cSld>
+  <p:clrMapOvr>
+    <a:masterClrMapping/>
+  </p:clrMapOvr>
+</p:sld>
+</file>
+
+<file path=ppt/slides/slide15.xml><?xml version="1.0" encoding="utf-8"?>
 <p:sld xmlns:a="http://schemas.openxmlformats.org/drawingml/2006/main" xmlns:r="http://schemas.openxmlformats.org/officeDocument/2006/relationships" xmlns:p="http://schemas.openxmlformats.org/presentationml/2006/main">
   <p:cSld>
     <p:spTree>
@@ -14679,6 +15574,15 @@
             </a:r>
           </a:p>
           <a:p>
+            <a:pPr marL="114300" indent="0">
+              <a:buNone/>
+            </a:pPr>
+            <a:endParaRPr lang="en-US" sz="2400" dirty="0">
+              <a:latin typeface="Times New Roman" panose="02020603050405020304" pitchFamily="18" charset="0"/>
+              <a:cs typeface="Times New Roman" panose="02020603050405020304" pitchFamily="18" charset="0"/>
+            </a:endParaRPr>
+          </a:p>
+          <a:p>
             <a:pPr marL="114300" lvl="0" indent="0">
               <a:buNone/>
             </a:pPr>
@@ -14689,11 +15593,24 @@
                     <a:lumMod val="50000"/>
                   </a:schemeClr>
                 </a:solidFill>
-                <a:latin typeface="Times New Roman" panose="02020603050405020304" pitchFamily="18" charset="0"/>
+                <a:latin typeface="Calibri" panose="020F0502020204030204" pitchFamily="34" charset="0"/>
                 <a:ea typeface="Calibri" panose="020F0502020204030204" pitchFamily="34" charset="0"/>
-                <a:cs typeface="Times New Roman" panose="02020603050405020304" pitchFamily="18" charset="0"/>
-              </a:rPr>
-              <a:t>16/4/2026                                                                   </a:t>
+                <a:cs typeface="Calibri" panose="020F0502020204030204" pitchFamily="34" charset="0"/>
+              </a:rPr>
+              <a:t>16/4/2026                                                                   ENG22CT0052, Dept. of Computer Science &amp; Technology, </a:t>
+            </a:r>
+            <a:r>
+              <a:rPr lang="en-US" sz="1200" dirty="0" err="1">
+                <a:solidFill>
+                  <a:schemeClr val="bg1">
+                    <a:lumMod val="50000"/>
+                  </a:schemeClr>
+                </a:solidFill>
+                <a:latin typeface="Calibri" panose="020F0502020204030204" pitchFamily="34" charset="0"/>
+                <a:ea typeface="Calibri" panose="020F0502020204030204" pitchFamily="34" charset="0"/>
+                <a:cs typeface="Calibri" panose="020F0502020204030204" pitchFamily="34" charset="0"/>
+              </a:rPr>
+              <a:t>SoE</a:t>
             </a:r>
             <a:r>
               <a:rPr lang="en-US" sz="1200" dirty="0">
@@ -14702,32 +15619,9 @@
                     <a:lumMod val="50000"/>
                   </a:schemeClr>
                 </a:solidFill>
-                <a:latin typeface="Times New Roman" panose="02020603050405020304" pitchFamily="18" charset="0"/>
-                <a:cs typeface="Times New Roman" panose="02020603050405020304" pitchFamily="18" charset="0"/>
-              </a:rPr>
-              <a:t>ENG22CT0045, Dept. of Computer Science &amp; Technology, </a:t>
-            </a:r>
-            <a:r>
-              <a:rPr lang="en-US" sz="1200" dirty="0" err="1">
-                <a:solidFill>
-                  <a:schemeClr val="bg1">
-                    <a:lumMod val="50000"/>
-                  </a:schemeClr>
-                </a:solidFill>
-                <a:latin typeface="Times New Roman" panose="02020603050405020304" pitchFamily="18" charset="0"/>
-                <a:cs typeface="Times New Roman" panose="02020603050405020304" pitchFamily="18" charset="0"/>
-              </a:rPr>
-              <a:t>SoE</a:t>
-            </a:r>
-            <a:r>
-              <a:rPr lang="en-US" sz="1200" dirty="0">
-                <a:solidFill>
-                  <a:schemeClr val="bg1">
-                    <a:lumMod val="50000"/>
-                  </a:schemeClr>
-                </a:solidFill>
-                <a:latin typeface="Times New Roman" panose="02020603050405020304" pitchFamily="18" charset="0"/>
-                <a:cs typeface="Times New Roman" panose="02020603050405020304" pitchFamily="18" charset="0"/>
+                <a:latin typeface="Calibri" panose="020F0502020204030204" pitchFamily="34" charset="0"/>
+                <a:ea typeface="Calibri" panose="020F0502020204030204" pitchFamily="34" charset="0"/>
+                <a:cs typeface="Calibri" panose="020F0502020204030204" pitchFamily="34" charset="0"/>
               </a:rPr>
               <a:t>, DSU</a:t>
             </a:r>
@@ -14766,7 +15660,7 @@
             </a:pPr>
             <a:fld id="{00000000-1234-1234-1234-123412341234}" type="slidenum">
               <a:rPr lang="en-US" smtClean="0"/>
-              <a:t>14</a:t>
+              <a:t>15</a:t>
             </a:fld>
             <a:endParaRPr lang="en-US" dirty="0"/>
           </a:p>
@@ -14869,7 +15763,7 @@
 </p:sld>
 </file>
 
-<file path=ppt/slides/slide15.xml><?xml version="1.0" encoding="utf-8"?>
+<file path=ppt/slides/slide16.xml><?xml version="1.0" encoding="utf-8"?>
 <p:sld xmlns:a="http://schemas.openxmlformats.org/drawingml/2006/main" xmlns:r="http://schemas.openxmlformats.org/officeDocument/2006/relationships" xmlns:p="http://schemas.openxmlformats.org/presentationml/2006/main">
   <p:cSld>
     <p:spTree>
@@ -15080,6 +15974,51 @@
             <a:pPr marL="114300" lvl="0" indent="0">
               <a:buNone/>
             </a:pPr>
+            <a:endParaRPr lang="en-US" sz="1200" dirty="0">
+              <a:solidFill>
+                <a:schemeClr val="bg1">
+                  <a:lumMod val="50000"/>
+                </a:schemeClr>
+              </a:solidFill>
+              <a:latin typeface="Times New Roman" panose="02020603050405020304" pitchFamily="18" charset="0"/>
+              <a:ea typeface="Calibri" panose="020F0502020204030204" pitchFamily="34" charset="0"/>
+              <a:cs typeface="Times New Roman" panose="02020603050405020304" pitchFamily="18" charset="0"/>
+            </a:endParaRPr>
+          </a:p>
+          <a:p>
+            <a:pPr marL="114300" lvl="0" indent="0">
+              <a:buNone/>
+            </a:pPr>
+            <a:endParaRPr lang="en-US" sz="1200" dirty="0">
+              <a:solidFill>
+                <a:schemeClr val="bg1">
+                  <a:lumMod val="50000"/>
+                </a:schemeClr>
+              </a:solidFill>
+              <a:latin typeface="Times New Roman" panose="02020603050405020304" pitchFamily="18" charset="0"/>
+              <a:ea typeface="Calibri" panose="020F0502020204030204" pitchFamily="34" charset="0"/>
+              <a:cs typeface="Times New Roman" panose="02020603050405020304" pitchFamily="18" charset="0"/>
+            </a:endParaRPr>
+          </a:p>
+          <a:p>
+            <a:pPr marL="114300" lvl="0" indent="0">
+              <a:buNone/>
+            </a:pPr>
+            <a:endParaRPr lang="en-US" sz="1200" dirty="0">
+              <a:solidFill>
+                <a:schemeClr val="bg1">
+                  <a:lumMod val="50000"/>
+                </a:schemeClr>
+              </a:solidFill>
+              <a:latin typeface="Times New Roman" panose="02020603050405020304" pitchFamily="18" charset="0"/>
+              <a:ea typeface="Calibri" panose="020F0502020204030204" pitchFamily="34" charset="0"/>
+              <a:cs typeface="Times New Roman" panose="02020603050405020304" pitchFamily="18" charset="0"/>
+            </a:endParaRPr>
+          </a:p>
+          <a:p>
+            <a:pPr marL="114300" lvl="0" indent="0">
+              <a:buNone/>
+            </a:pPr>
             <a:r>
               <a:rPr lang="en-US" sz="1200" dirty="0">
                 <a:solidFill>
@@ -15091,7 +16030,7 @@
                 <a:ea typeface="Calibri" panose="020F0502020204030204" pitchFamily="34" charset="0"/>
                 <a:cs typeface="Calibri" panose="020F0502020204030204" pitchFamily="34" charset="0"/>
               </a:rPr>
-              <a:t>16/4/2026                                                                   ENG22CT0045, Dept. of Computer Science &amp; Technology, </a:t>
+              <a:t>16/4/2026                                                                   ENG22CT0052, Dept. of Computer Science &amp; Technology, </a:t>
             </a:r>
             <a:r>
               <a:rPr lang="en-US" sz="1200" dirty="0" err="1">
@@ -15157,7 +16096,7 @@
             </a:pPr>
             <a:fld id="{00000000-1234-1234-1234-123412341234}" type="slidenum">
               <a:rPr lang="en-US" smtClean="0"/>
-              <a:t>15</a:t>
+              <a:t>16</a:t>
             </a:fld>
             <a:endParaRPr lang="en-US"/>
           </a:p>
@@ -15260,7 +16199,7 @@
 </p:sld>
 </file>
 
-<file path=ppt/slides/slide16.xml><?xml version="1.0" encoding="utf-8"?>
+<file path=ppt/slides/slide17.xml><?xml version="1.0" encoding="utf-8"?>
 <p:sld xmlns:a="http://schemas.openxmlformats.org/drawingml/2006/main" xmlns:r="http://schemas.openxmlformats.org/officeDocument/2006/relationships" xmlns:p="http://schemas.openxmlformats.org/presentationml/2006/main">
   <p:cSld>
     <p:spTree>
@@ -15464,7 +16403,7 @@
             <a:pPr lvl="0"/>
             <a:r>
               <a:rPr lang="en-US" dirty="0"/>
-              <a:t>ENG22CT0045, Dept. of Computer Science &amp; Technology, </a:t>
+              <a:t>ENG22CT0052, Dept. of Computer Science &amp; Technology, </a:t>
             </a:r>
             <a:r>
               <a:rPr lang="en-US" dirty="0" err="1"/>
@@ -15517,7 +16456,7 @@
             </a:pPr>
             <a:fld id="{00000000-1234-1234-1234-123412341234}" type="slidenum">
               <a:rPr lang="en-US"/>
-              <a:t>16</a:t>
+              <a:t>17</a:t>
             </a:fld>
             <a:endParaRPr/>
           </a:p>
@@ -16035,7 +16974,7 @@
             </a:pPr>
             <a:r>
               <a:rPr lang="en-US" dirty="0"/>
-              <a:t>ENG22CT0045, Dept. of Computer Science &amp; Technology, </a:t>
+              <a:t>ENG22CT0052, Dept. of Computer Science &amp; Technology, </a:t>
             </a:r>
             <a:r>
               <a:rPr lang="en-US" dirty="0" err="1"/>
@@ -16445,7 +17384,7 @@
             <a:pPr lvl="0"/>
             <a:r>
               <a:rPr lang="en-US" dirty="0"/>
-              <a:t>ENG22CT0045, Dept. of Computer Science &amp; Technology, </a:t>
+              <a:t>ENG22CT0052, Dept. of Computer Science &amp; Technology, </a:t>
             </a:r>
             <a:r>
               <a:rPr lang="en-US" dirty="0" err="1"/>
@@ -16841,7 +17780,7 @@
             </a:pPr>
             <a:r>
               <a:rPr lang="en-US" dirty="0"/>
-              <a:t>ENG22CT0045, Dept. of Computer Science &amp; Technology, </a:t>
+              <a:t>ENG22CT0052, Dept. of Computer Science &amp; Technology, </a:t>
             </a:r>
             <a:r>
               <a:rPr lang="en-US" dirty="0" err="1"/>
@@ -17298,7 +18237,7 @@
             <a:pPr lvl="0"/>
             <a:r>
               <a:rPr lang="en-US" dirty="0"/>
-              <a:t>ENG22CT0045, Dept. of Computer Science &amp; Technology, </a:t>
+              <a:t>ENG22CT0052, Dept. of Computer Science &amp; Technology, </a:t>
             </a:r>
             <a:r>
               <a:rPr lang="en-US" dirty="0" err="1"/>
@@ -17636,17 +18575,17 @@
               <a:buNone/>
             </a:pPr>
             <a:r>
-              <a:rPr lang="en-US" sz="1300" dirty="0">
+              <a:rPr lang="en-US" sz="4800" dirty="0">
                 <a:solidFill>
                   <a:schemeClr val="bg1">
                     <a:lumMod val="50000"/>
                   </a:schemeClr>
                 </a:solidFill>
               </a:rPr>
-              <a:t>16/4/2026                                                                       ENG22CT0045, Dept. of Computer Science &amp; Technology, </a:t>
-            </a:r>
-            <a:r>
-              <a:rPr lang="en-US" sz="1300" dirty="0" err="1">
+              <a:t>16/4/2026                                                                       ENG22CT0052, Dept. of Computer Science &amp; Technology, </a:t>
+            </a:r>
+            <a:r>
+              <a:rPr lang="en-US" sz="4800" dirty="0" err="1">
                 <a:solidFill>
                   <a:schemeClr val="bg1">
                     <a:lumMod val="50000"/>
@@ -17656,7 +18595,7 @@
               <a:t>SoE</a:t>
             </a:r>
             <a:r>
-              <a:rPr lang="en-US" sz="1300" dirty="0">
+              <a:rPr lang="en-US" sz="4800" dirty="0">
                 <a:solidFill>
                   <a:schemeClr val="bg1">
                     <a:lumMod val="50000"/>
@@ -17888,21 +18827,97 @@
           <p:nvPr/>
         </p:nvPicPr>
         <p:blipFill>
-          <a:blip r:embed="rId2"/>
+          <a:blip r:embed="rId3"/>
           <a:stretch>
             <a:fillRect/>
           </a:stretch>
         </p:blipFill>
         <p:spPr>
           <a:xfrm>
-            <a:off x="2845788" y="137557"/>
-            <a:ext cx="6500423" cy="6401355"/>
+            <a:off x="2845788" y="136525"/>
+            <a:ext cx="6500423" cy="5846286"/>
           </a:xfrm>
           <a:prstGeom prst="rect">
             <a:avLst/>
           </a:prstGeom>
         </p:spPr>
       </p:pic>
+      <p:sp>
+        <p:nvSpPr>
+          <p:cNvPr id="3" name="TextBox 2">
+            <a:extLst>
+              <a:ext uri="{FF2B5EF4-FFF2-40B4-BE49-F238E27FC236}">
+                <a16:creationId xmlns:a16="http://schemas.microsoft.com/office/drawing/2014/main" id="{3770C88C-2048-6671-6790-CF7E66577005}"/>
+              </a:ext>
+            </a:extLst>
+          </p:cNvPr>
+          <p:cNvSpPr txBox="1"/>
+          <p:nvPr/>
+        </p:nvSpPr>
+        <p:spPr>
+          <a:xfrm>
+            <a:off x="2213966" y="5982811"/>
+            <a:ext cx="7948605" cy="800219"/>
+          </a:xfrm>
+          <a:prstGeom prst="rect">
+            <a:avLst/>
+          </a:prstGeom>
+          <a:noFill/>
+        </p:spPr>
+        <p:txBody>
+          <a:bodyPr wrap="square">
+            <a:spAutoFit/>
+          </a:bodyPr>
+          <a:lstStyle/>
+          <a:p>
+            <a:pPr indent="457200" algn="ctr">
+              <a:buNone/>
+            </a:pPr>
+            <a:r>
+              <a:rPr lang="en-IN" b="1" dirty="0">
+                <a:effectLst/>
+                <a:latin typeface="Times New Roman" panose="02020603050405020304" pitchFamily="18" charset="0"/>
+                <a:ea typeface="Times New Roman" panose="02020603050405020304" pitchFamily="18" charset="0"/>
+              </a:rPr>
+              <a:t>Fig 1:</a:t>
+            </a:r>
+            <a:r>
+              <a:rPr lang="en-IN" dirty="0">
+                <a:effectLst/>
+                <a:latin typeface="Times New Roman" panose="02020603050405020304" pitchFamily="18" charset="0"/>
+                <a:ea typeface="Times New Roman" panose="02020603050405020304" pitchFamily="18" charset="0"/>
+              </a:rPr>
+              <a:t> </a:t>
+            </a:r>
+            <a:r>
+              <a:rPr lang="en-IN" b="1" dirty="0">
+                <a:effectLst/>
+                <a:latin typeface="Times New Roman" panose="02020603050405020304" pitchFamily="18" charset="0"/>
+                <a:ea typeface="Times New Roman" panose="02020603050405020304" pitchFamily="18" charset="0"/>
+              </a:rPr>
+              <a:t>Sales Distribution Across Different Countries</a:t>
+            </a:r>
+            <a:endParaRPr lang="en-IN" dirty="0">
+              <a:effectLst/>
+              <a:latin typeface="Times New Roman" panose="02020603050405020304" pitchFamily="18" charset="0"/>
+              <a:ea typeface="Times New Roman" panose="02020603050405020304" pitchFamily="18" charset="0"/>
+            </a:endParaRPr>
+          </a:p>
+          <a:p>
+            <a:pPr algn="just">
+              <a:buNone/>
+            </a:pPr>
+            <a:r>
+              <a:rPr lang="en-IN" sz="1600" dirty="0">
+                <a:effectLst/>
+                <a:latin typeface="Times New Roman" panose="02020603050405020304" pitchFamily="18" charset="0"/>
+                <a:ea typeface="Times New Roman" panose="02020603050405020304" pitchFamily="18" charset="0"/>
+              </a:rPr>
+              <a:t>This bar chart shows sales across different countries. It helps compare performance and identify which countries have higher or lower sales.</a:t>
+            </a:r>
+          </a:p>
+        </p:txBody>
+      </p:sp>
     </p:spTree>
     <p:extLst>
       <p:ext uri="{BB962C8B-B14F-4D97-AF65-F5344CB8AC3E}">
@@ -17989,13 +19004,13 @@
         </p:nvSpPr>
         <p:spPr>
           <a:xfrm>
-            <a:off x="838200" y="2108708"/>
+            <a:off x="838199" y="1854185"/>
             <a:ext cx="10515600" cy="4895851"/>
           </a:xfrm>
         </p:spPr>
         <p:txBody>
           <a:bodyPr>
-            <a:normAutofit fontScale="92500" lnSpcReduction="20000"/>
+            <a:normAutofit fontScale="85000" lnSpcReduction="20000"/>
           </a:bodyPr>
           <a:lstStyle/>
           <a:p>
@@ -18159,7 +19174,7 @@
                   </a:schemeClr>
                 </a:solidFill>
               </a:rPr>
-              <a:t>ENG22CT0045, Dept. of Computer Science &amp; Technology, </a:t>
+              <a:t>ENG22CT0052, Dept. of Computer Science &amp; Technology, </a:t>
             </a:r>
             <a:r>
               <a:rPr lang="en-US" sz="1300" dirty="0" err="1">
@@ -18412,8 +19427,8 @@
         </p:blipFill>
         <p:spPr>
           <a:xfrm>
-            <a:off x="5078729" y="404614"/>
-            <a:ext cx="6782388" cy="5951736"/>
+            <a:off x="5078729" y="136525"/>
+            <a:ext cx="6782388" cy="5278556"/>
           </a:xfrm>
           <a:prstGeom prst="rect">
             <a:avLst/>
@@ -18450,6 +19465,173 @@
           </a:prstGeom>
         </p:spPr>
       </p:pic>
+      <p:sp>
+        <p:nvSpPr>
+          <p:cNvPr id="5" name="TextBox 4">
+            <a:extLst>
+              <a:ext uri="{FF2B5EF4-FFF2-40B4-BE49-F238E27FC236}">
+                <a16:creationId xmlns:a16="http://schemas.microsoft.com/office/drawing/2014/main" id="{52624F9E-3E6D-0333-B3EC-73C09AD4AF8A}"/>
+              </a:ext>
+            </a:extLst>
+          </p:cNvPr>
+          <p:cNvSpPr txBox="1"/>
+          <p:nvPr/>
+        </p:nvSpPr>
+        <p:spPr>
+          <a:xfrm>
+            <a:off x="0" y="4552147"/>
+            <a:ext cx="4766107" cy="1154162"/>
+          </a:xfrm>
+          <a:prstGeom prst="rect">
+            <a:avLst/>
+          </a:prstGeom>
+          <a:noFill/>
+        </p:spPr>
+        <p:txBody>
+          <a:bodyPr wrap="square">
+            <a:spAutoFit/>
+          </a:bodyPr>
+          <a:lstStyle/>
+          <a:p>
+            <a:pPr indent="457200" algn="ctr">
+              <a:buNone/>
+            </a:pPr>
+            <a:r>
+              <a:rPr lang="en-IN" sz="1300" b="1" dirty="0">
+                <a:effectLst/>
+                <a:latin typeface="Times New Roman" panose="02020603050405020304" pitchFamily="18" charset="0"/>
+                <a:ea typeface="Times New Roman" panose="02020603050405020304" pitchFamily="18" charset="0"/>
+              </a:rPr>
+              <a:t>Fig 2:</a:t>
+            </a:r>
+            <a:r>
+              <a:rPr lang="en-IN" sz="1300" dirty="0">
+                <a:effectLst/>
+                <a:latin typeface="Times New Roman" panose="02020603050405020304" pitchFamily="18" charset="0"/>
+                <a:ea typeface="Times New Roman" panose="02020603050405020304" pitchFamily="18" charset="0"/>
+              </a:rPr>
+              <a:t> </a:t>
+            </a:r>
+            <a:r>
+              <a:rPr lang="en-IN" sz="1300" b="1" dirty="0">
+                <a:effectLst/>
+                <a:latin typeface="Times New Roman" panose="02020603050405020304" pitchFamily="18" charset="0"/>
+                <a:ea typeface="Times New Roman" panose="02020603050405020304" pitchFamily="18" charset="0"/>
+              </a:rPr>
+              <a:t>Model Evaluation Metrics (MSE and R² Score)</a:t>
+            </a:r>
+            <a:endParaRPr lang="en-IN" sz="1300" dirty="0">
+              <a:effectLst/>
+              <a:latin typeface="Times New Roman" panose="02020603050405020304" pitchFamily="18" charset="0"/>
+              <a:ea typeface="Times New Roman" panose="02020603050405020304" pitchFamily="18" charset="0"/>
+            </a:endParaRPr>
+          </a:p>
+          <a:p>
+            <a:pPr algn="just">
+              <a:buNone/>
+            </a:pPr>
+            <a:r>
+              <a:rPr lang="en-IN" dirty="0">
+                <a:effectLst/>
+                <a:latin typeface="Times New Roman" panose="02020603050405020304" pitchFamily="18" charset="0"/>
+                <a:ea typeface="Times New Roman" panose="02020603050405020304" pitchFamily="18" charset="0"/>
+              </a:rPr>
+              <a:t>This output shows the performance of the regression model using Mean Squared Error (MSE) and R² score. The MSE indicates the prediction error, while the R² score represents how well the model explains the data.</a:t>
+            </a:r>
+          </a:p>
+        </p:txBody>
+      </p:sp>
+      <p:sp>
+        <p:nvSpPr>
+          <p:cNvPr id="8" name="TextBox 7">
+            <a:extLst>
+              <a:ext uri="{FF2B5EF4-FFF2-40B4-BE49-F238E27FC236}">
+                <a16:creationId xmlns:a16="http://schemas.microsoft.com/office/drawing/2014/main" id="{19ADEA30-267C-096F-DF0F-2C3DDED4AAE8}"/>
+              </a:ext>
+            </a:extLst>
+          </p:cNvPr>
+          <p:cNvSpPr txBox="1"/>
+          <p:nvPr/>
+        </p:nvSpPr>
+        <p:spPr>
+          <a:xfrm>
+            <a:off x="5749685" y="5415081"/>
+            <a:ext cx="6111432" cy="1169551"/>
+          </a:xfrm>
+          <a:prstGeom prst="rect">
+            <a:avLst/>
+          </a:prstGeom>
+          <a:noFill/>
+        </p:spPr>
+        <p:txBody>
+          <a:bodyPr wrap="square">
+            <a:spAutoFit/>
+          </a:bodyPr>
+          <a:lstStyle/>
+          <a:p>
+            <a:pPr indent="457200" algn="ctr">
+              <a:buNone/>
+            </a:pPr>
+            <a:endParaRPr lang="en-IN" sz="1400" b="1" dirty="0">
+              <a:effectLst/>
+              <a:latin typeface="Times New Roman" panose="02020603050405020304" pitchFamily="18" charset="0"/>
+              <a:ea typeface="Times New Roman" panose="02020603050405020304" pitchFamily="18" charset="0"/>
+            </a:endParaRPr>
+          </a:p>
+          <a:p>
+            <a:pPr indent="457200" algn="ctr">
+              <a:buNone/>
+            </a:pPr>
+            <a:r>
+              <a:rPr lang="en-IN" sz="1400" b="1" dirty="0">
+                <a:effectLst/>
+                <a:latin typeface="Times New Roman" panose="02020603050405020304" pitchFamily="18" charset="0"/>
+                <a:ea typeface="Times New Roman" panose="02020603050405020304" pitchFamily="18" charset="0"/>
+              </a:rPr>
+              <a:t>Fig 3:</a:t>
+            </a:r>
+            <a:r>
+              <a:rPr lang="en-IN" sz="1400" dirty="0">
+                <a:effectLst/>
+                <a:latin typeface="Times New Roman" panose="02020603050405020304" pitchFamily="18" charset="0"/>
+                <a:ea typeface="Times New Roman" panose="02020603050405020304" pitchFamily="18" charset="0"/>
+              </a:rPr>
+              <a:t> </a:t>
+            </a:r>
+            <a:r>
+              <a:rPr lang="en-IN" sz="1400" b="1" dirty="0">
+                <a:effectLst/>
+                <a:latin typeface="Times New Roman" panose="02020603050405020304" pitchFamily="18" charset="0"/>
+                <a:ea typeface="Times New Roman" panose="02020603050405020304" pitchFamily="18" charset="0"/>
+              </a:rPr>
+              <a:t>Actual vs Predicted House Prices</a:t>
+            </a:r>
+            <a:endParaRPr lang="en-IN" sz="1200" dirty="0">
+              <a:effectLst/>
+              <a:latin typeface="Times New Roman" panose="02020603050405020304" pitchFamily="18" charset="0"/>
+              <a:ea typeface="Times New Roman" panose="02020603050405020304" pitchFamily="18" charset="0"/>
+            </a:endParaRPr>
+          </a:p>
+          <a:p>
+            <a:pPr algn="just">
+              <a:buNone/>
+            </a:pPr>
+            <a:r>
+              <a:rPr lang="en-IN" sz="1400" dirty="0">
+                <a:effectLst/>
+                <a:latin typeface="Times New Roman" panose="02020603050405020304" pitchFamily="18" charset="0"/>
+                <a:ea typeface="Times New Roman" panose="02020603050405020304" pitchFamily="18" charset="0"/>
+              </a:rPr>
+              <a:t>This scatter plot compares actual house prices with predicted values from the model. The closer the points are to a straight line, the better the model’s predictions, indicating good accuracy.</a:t>
+            </a:r>
+            <a:endParaRPr lang="en-IN" sz="1200" dirty="0">
+              <a:effectLst/>
+              <a:latin typeface="Times New Roman" panose="02020603050405020304" pitchFamily="18" charset="0"/>
+              <a:ea typeface="Times New Roman" panose="02020603050405020304" pitchFamily="18" charset="0"/>
+            </a:endParaRPr>
+          </a:p>
+        </p:txBody>
+      </p:sp>
     </p:spTree>
     <p:extLst>
       <p:ext uri="{BB962C8B-B14F-4D97-AF65-F5344CB8AC3E}">
